--- a/SST_Complete_Course_SagarSir/02_History_इतिहास/Class_08_History_1857_Revolt.pptx
+++ b/SST_Complete_Course_SagarSir/02_History_इतिहास/Class_08_History_1857_Revolt.pptx
@@ -3367,7 +3367,7 @@
               </a:defRPr>
             </a:pPr>
             <a:r>
-              <a:t>मार्गदर्शक: श्रवण कुमार 'सागर' (Sagar Sir)  |  Helpline: +91 91101 13671  |  sagarcoaching.tech</a:t>
+              <a:t>मार्गदर्शक: श्रवण कुमार 'सागर' (Sagar Sir)  |  sagarcoaching.tech</a:t>
             </a:r>
           </a:p>
         </p:txBody>
@@ -3558,7 +3558,7 @@
               </a:defRPr>
             </a:pPr>
             <a:r>
-              <a:t>WhatsApp / Helpline: +91 91101 13671  |  Official Website: sagarcoaching.tech  |  Slide 10 of 37</a:t>
+              <a:t>Official Website: sagarcoaching.tech  |  Slide 10 of 37</a:t>
             </a:r>
           </a:p>
         </p:txBody>
@@ -4092,7 +4092,7 @@
               </a:defRPr>
             </a:pPr>
             <a:r>
-              <a:t>WhatsApp / Helpline: +91 91101 13671  |  Official Website: sagarcoaching.tech  |  Slide 11 of 37</a:t>
+              <a:t>Official Website: sagarcoaching.tech  |  Slide 11 of 37</a:t>
             </a:r>
           </a:p>
         </p:txBody>
@@ -4558,7 +4558,7 @@
               </a:defRPr>
             </a:pPr>
             <a:r>
-              <a:t>WhatsApp / Helpline: +91 91101 13671  |  Official Website: sagarcoaching.tech  |  Slide 12 of 37</a:t>
+              <a:t>Official Website: sagarcoaching.tech  |  Slide 12 of 37</a:t>
             </a:r>
           </a:p>
         </p:txBody>
@@ -5092,7 +5092,7 @@
               </a:defRPr>
             </a:pPr>
             <a:r>
-              <a:t>WhatsApp / Helpline: +91 91101 13671  |  Official Website: sagarcoaching.tech  |  Slide 13 of 37</a:t>
+              <a:t>Official Website: sagarcoaching.tech  |  Slide 13 of 37</a:t>
             </a:r>
           </a:p>
         </p:txBody>
@@ -5558,7 +5558,7 @@
               </a:defRPr>
             </a:pPr>
             <a:r>
-              <a:t>WhatsApp / Helpline: +91 91101 13671  |  Official Website: sagarcoaching.tech  |  Slide 14 of 37</a:t>
+              <a:t>Official Website: sagarcoaching.tech  |  Slide 14 of 37</a:t>
             </a:r>
           </a:p>
         </p:txBody>
@@ -6092,7 +6092,7 @@
               </a:defRPr>
             </a:pPr>
             <a:r>
-              <a:t>WhatsApp / Helpline: +91 91101 13671  |  Official Website: sagarcoaching.tech  |  Slide 15 of 37</a:t>
+              <a:t>Official Website: sagarcoaching.tech  |  Slide 15 of 37</a:t>
             </a:r>
           </a:p>
         </p:txBody>
@@ -6558,7 +6558,7 @@
               </a:defRPr>
             </a:pPr>
             <a:r>
-              <a:t>WhatsApp / Helpline: +91 91101 13671  |  Official Website: sagarcoaching.tech  |  Slide 16 of 37</a:t>
+              <a:t>Official Website: sagarcoaching.tech  |  Slide 16 of 37</a:t>
             </a:r>
           </a:p>
         </p:txBody>
@@ -7092,7 +7092,7 @@
               </a:defRPr>
             </a:pPr>
             <a:r>
-              <a:t>WhatsApp / Helpline: +91 91101 13671  |  Official Website: sagarcoaching.tech  |  Slide 17 of 37</a:t>
+              <a:t>Official Website: sagarcoaching.tech  |  Slide 17 of 37</a:t>
             </a:r>
           </a:p>
         </p:txBody>
@@ -7558,7 +7558,7 @@
               </a:defRPr>
             </a:pPr>
             <a:r>
-              <a:t>WhatsApp / Helpline: +91 91101 13671  |  Official Website: sagarcoaching.tech  |  Slide 18 of 37</a:t>
+              <a:t>Official Website: sagarcoaching.tech  |  Slide 18 of 37</a:t>
             </a:r>
           </a:p>
         </p:txBody>
@@ -8092,7 +8092,7 @@
               </a:defRPr>
             </a:pPr>
             <a:r>
-              <a:t>WhatsApp / Helpline: +91 91101 13671  |  Official Website: sagarcoaching.tech  |  Slide 19 of 37</a:t>
+              <a:t>Official Website: sagarcoaching.tech  |  Slide 19 of 37</a:t>
             </a:r>
           </a:p>
         </p:txBody>
@@ -8558,7 +8558,7 @@
               </a:defRPr>
             </a:pPr>
             <a:r>
-              <a:t>WhatsApp / Helpline: +91 91101 13671  |  Official Website: sagarcoaching.tech  |  Slide 2 of 37</a:t>
+              <a:t>Official Website: sagarcoaching.tech  |  Slide 2 of 37</a:t>
             </a:r>
           </a:p>
         </p:txBody>
@@ -8899,7 +8899,7 @@
               </a:defRPr>
             </a:pPr>
             <a:r>
-              <a:t>WhatsApp / Helpline: +91 91101 13671  |  Official Website: sagarcoaching.tech  |  Slide 20 of 37</a:t>
+              <a:t>Official Website: sagarcoaching.tech  |  Slide 20 of 37</a:t>
             </a:r>
           </a:p>
         </p:txBody>
@@ -9433,7 +9433,7 @@
               </a:defRPr>
             </a:pPr>
             <a:r>
-              <a:t>WhatsApp / Helpline: +91 91101 13671  |  Official Website: sagarcoaching.tech  |  Slide 21 of 37</a:t>
+              <a:t>Official Website: sagarcoaching.tech  |  Slide 21 of 37</a:t>
             </a:r>
           </a:p>
         </p:txBody>
@@ -9899,7 +9899,7 @@
               </a:defRPr>
             </a:pPr>
             <a:r>
-              <a:t>WhatsApp / Helpline: +91 91101 13671  |  Official Website: sagarcoaching.tech  |  Slide 22 of 37</a:t>
+              <a:t>Official Website: sagarcoaching.tech  |  Slide 22 of 37</a:t>
             </a:r>
           </a:p>
         </p:txBody>
@@ -10433,7 +10433,7 @@
               </a:defRPr>
             </a:pPr>
             <a:r>
-              <a:t>WhatsApp / Helpline: +91 91101 13671  |  Official Website: sagarcoaching.tech  |  Slide 23 of 37</a:t>
+              <a:t>Official Website: sagarcoaching.tech  |  Slide 23 of 37</a:t>
             </a:r>
           </a:p>
         </p:txBody>
@@ -10899,7 +10899,7 @@
               </a:defRPr>
             </a:pPr>
             <a:r>
-              <a:t>WhatsApp / Helpline: +91 91101 13671  |  Official Website: sagarcoaching.tech  |  Slide 24 of 37</a:t>
+              <a:t>Official Website: sagarcoaching.tech  |  Slide 24 of 37</a:t>
             </a:r>
           </a:p>
         </p:txBody>
@@ -11433,7 +11433,7 @@
               </a:defRPr>
             </a:pPr>
             <a:r>
-              <a:t>WhatsApp / Helpline: +91 91101 13671  |  Official Website: sagarcoaching.tech  |  Slide 25 of 37</a:t>
+              <a:t>Official Website: sagarcoaching.tech  |  Slide 25 of 37</a:t>
             </a:r>
           </a:p>
         </p:txBody>
@@ -11899,7 +11899,7 @@
               </a:defRPr>
             </a:pPr>
             <a:r>
-              <a:t>WhatsApp / Helpline: +91 91101 13671  |  Official Website: sagarcoaching.tech  |  Slide 26 of 37</a:t>
+              <a:t>Official Website: sagarcoaching.tech  |  Slide 26 of 37</a:t>
             </a:r>
           </a:p>
         </p:txBody>
@@ -12433,7 +12433,7 @@
               </a:defRPr>
             </a:pPr>
             <a:r>
-              <a:t>WhatsApp / Helpline: +91 91101 13671  |  Official Website: sagarcoaching.tech  |  Slide 27 of 37</a:t>
+              <a:t>Official Website: sagarcoaching.tech  |  Slide 27 of 37</a:t>
             </a:r>
           </a:p>
         </p:txBody>
@@ -12899,7 +12899,7 @@
               </a:defRPr>
             </a:pPr>
             <a:r>
-              <a:t>WhatsApp / Helpline: +91 91101 13671  |  Official Website: sagarcoaching.tech  |  Slide 28 of 37</a:t>
+              <a:t>Official Website: sagarcoaching.tech  |  Slide 28 of 37</a:t>
             </a:r>
           </a:p>
         </p:txBody>
@@ -13433,7 +13433,7 @@
               </a:defRPr>
             </a:pPr>
             <a:r>
-              <a:t>WhatsApp / Helpline: +91 91101 13671  |  Official Website: sagarcoaching.tech  |  Slide 29 of 37</a:t>
+              <a:t>Official Website: sagarcoaching.tech  |  Slide 29 of 37</a:t>
             </a:r>
           </a:p>
         </p:txBody>
@@ -13899,7 +13899,7 @@
               </a:defRPr>
             </a:pPr>
             <a:r>
-              <a:t>WhatsApp / Helpline: +91 91101 13671  |  Official Website: sagarcoaching.tech  |  Slide 3 of 37</a:t>
+              <a:t>Official Website: sagarcoaching.tech  |  Slide 3 of 37</a:t>
             </a:r>
           </a:p>
         </p:txBody>
@@ -14278,7 +14278,7 @@
               </a:defRPr>
             </a:pPr>
             <a:r>
-              <a:t>WhatsApp / Helpline: +91 91101 13671  |  Official Website: sagarcoaching.tech  |  Slide 30 of 37</a:t>
+              <a:t>Official Website: sagarcoaching.tech  |  Slide 30 of 37</a:t>
             </a:r>
           </a:p>
         </p:txBody>
@@ -14812,7 +14812,7 @@
               </a:defRPr>
             </a:pPr>
             <a:r>
-              <a:t>WhatsApp / Helpline: +91 91101 13671  |  Official Website: sagarcoaching.tech  |  Slide 31 of 37</a:t>
+              <a:t>Official Website: sagarcoaching.tech  |  Slide 31 of 37</a:t>
             </a:r>
           </a:p>
         </p:txBody>
@@ -15278,7 +15278,7 @@
               </a:defRPr>
             </a:pPr>
             <a:r>
-              <a:t>WhatsApp / Helpline: +91 91101 13671  |  Official Website: sagarcoaching.tech  |  Slide 32 of 37</a:t>
+              <a:t>Official Website: sagarcoaching.tech  |  Slide 32 of 37</a:t>
             </a:r>
           </a:p>
         </p:txBody>
@@ -15812,7 +15812,7 @@
               </a:defRPr>
             </a:pPr>
             <a:r>
-              <a:t>WhatsApp / Helpline: +91 91101 13671  |  Official Website: sagarcoaching.tech  |  Slide 33 of 37</a:t>
+              <a:t>Official Website: sagarcoaching.tech  |  Slide 33 of 37</a:t>
             </a:r>
           </a:p>
         </p:txBody>
@@ -16278,7 +16278,7 @@
               </a:defRPr>
             </a:pPr>
             <a:r>
-              <a:t>WhatsApp / Helpline: +91 91101 13671  |  Official Website: sagarcoaching.tech  |  Slide 34 of 37</a:t>
+              <a:t>Official Website: sagarcoaching.tech  |  Slide 34 of 37</a:t>
             </a:r>
           </a:p>
         </p:txBody>
@@ -16812,7 +16812,7 @@
               </a:defRPr>
             </a:pPr>
             <a:r>
-              <a:t>WhatsApp / Helpline: +91 91101 13671  |  Official Website: sagarcoaching.tech  |  Slide 35 of 37</a:t>
+              <a:t>Official Website: sagarcoaching.tech  |  Slide 35 of 37</a:t>
             </a:r>
           </a:p>
         </p:txBody>
@@ -17138,7 +17138,7 @@
               </a:defRPr>
             </a:pPr>
             <a:r>
-              <a:t>WhatsApp / Helpline: +91 91101 13671  |  Official Website: sagarcoaching.tech  |  Slide 36 of 37</a:t>
+              <a:t>Official Website: sagarcoaching.tech  |  Slide 36 of 37</a:t>
             </a:r>
           </a:p>
         </p:txBody>
@@ -17435,7 +17435,7 @@
               </a:defRPr>
             </a:pPr>
             <a:r>
-              <a:t>इस क्लास की PDF डाउनलोड करें: sagarcoaching.tech | Helpline: +91 91101 13671</a:t>
+              <a:t>इस क्लास की PDF डाउनलोड करें: sagarcoaching.tech</a:t>
             </a:r>
           </a:p>
         </p:txBody>
@@ -17539,7 +17539,7 @@
               </a:defRPr>
             </a:pPr>
             <a:r>
-              <a:t>मार्गदर्शक: श्रवण कुमार 'सागर' (Sagar Sir)  |  Helpline: +91 91101 13671  |  sagarcoaching.tech</a:t>
+              <a:t>मार्गदर्शक: श्रवण कुमार 'सागर' (Sagar Sir)  |  sagarcoaching.tech</a:t>
             </a:r>
           </a:p>
         </p:txBody>
@@ -17730,7 +17730,7 @@
               </a:defRPr>
             </a:pPr>
             <a:r>
-              <a:t>WhatsApp / Helpline: +91 91101 13671  |  Official Website: sagarcoaching.tech  |  Slide 4 of 37</a:t>
+              <a:t>Official Website: sagarcoaching.tech  |  Slide 4 of 37</a:t>
             </a:r>
           </a:p>
         </p:txBody>
@@ -18090,7 +18090,7 @@
               </a:defRPr>
             </a:pPr>
             <a:r>
-              <a:t>WhatsApp / Helpline: +91 91101 13671  |  Official Website: sagarcoaching.tech  |  Slide 5 of 37</a:t>
+              <a:t>Official Website: sagarcoaching.tech  |  Slide 5 of 37</a:t>
             </a:r>
           </a:p>
         </p:txBody>
@@ -18556,7 +18556,7 @@
               </a:defRPr>
             </a:pPr>
             <a:r>
-              <a:t>WhatsApp / Helpline: +91 91101 13671  |  Official Website: sagarcoaching.tech  |  Slide 6 of 37</a:t>
+              <a:t>Official Website: sagarcoaching.tech  |  Slide 6 of 37</a:t>
             </a:r>
           </a:p>
         </p:txBody>
@@ -19090,7 +19090,7 @@
               </a:defRPr>
             </a:pPr>
             <a:r>
-              <a:t>WhatsApp / Helpline: +91 91101 13671  |  Official Website: sagarcoaching.tech  |  Slide 7 of 37</a:t>
+              <a:t>Official Website: sagarcoaching.tech  |  Slide 7 of 37</a:t>
             </a:r>
           </a:p>
         </p:txBody>
@@ -19556,7 +19556,7 @@
               </a:defRPr>
             </a:pPr>
             <a:r>
-              <a:t>WhatsApp / Helpline: +91 91101 13671  |  Official Website: sagarcoaching.tech  |  Slide 8 of 37</a:t>
+              <a:t>Official Website: sagarcoaching.tech  |  Slide 8 of 37</a:t>
             </a:r>
           </a:p>
         </p:txBody>
@@ -20090,7 +20090,7 @@
               </a:defRPr>
             </a:pPr>
             <a:r>
-              <a:t>WhatsApp / Helpline: +91 91101 13671  |  Official Website: sagarcoaching.tech  |  Slide 9 of 37</a:t>
+              <a:t>Official Website: sagarcoaching.tech  |  Slide 9 of 37</a:t>
             </a:r>
           </a:p>
         </p:txBody>
